--- a/curso_es/pptx/S66.pptx
+++ b/curso_es/pptx/S66.pptx
@@ -3799,7 +3799,7 @@
                 </a:solidFill>
                 <a:latin typeface="Nunito Sans"/>
               </a:rPr>
-              <a:t>Iker propone subir a Artxanda en bici. Anuncian tormenta. Maialen y Omar lo ven en el móvil, pero callan: el grupo está muy animado y no quieren cortar el rollo.</a:t>
+              <a:t>Un chico propone subir a Artxanda en bici. Anuncian tormenta. Dos del grupo lo ven en el móvil, pero callan: el grupo está muy animado y no quieren cortar el rollo.</a:t>
             </a:r>
           </a:p>
         </p:txBody>
@@ -3847,7 +3847,7 @@
                 </a:solidFill>
                 <a:latin typeface="Nunito Sans"/>
               </a:rPr>
-              <a:t>¿Había dudas en el grupo? Sí: Maialen y Omar sabían lo de la tormenta.</a:t>
+              <a:t>¿Había dudas en el grupo? Sí: dos del grupo sabían lo de la tormenta.</a:t>
             </a:r>
           </a:p>
           <a:p>
@@ -4212,7 +4212,7 @@
                 </a:solidFill>
                 <a:latin typeface="Nunito Sans"/>
               </a:rPr>
-              <a:t>Así cuentan también las ideas de los tímidos, y no mandan siempre los mismos</a:t>
+              <a:t>Así cuentan también las ideas de quien habla menos, y no mandan siempre los mismos</a:t>
             </a:r>
           </a:p>
           <a:p>
@@ -4457,7 +4457,7 @@
                 </a:solidFill>
                 <a:latin typeface="Nunito Sans"/>
               </a:rPr>
-              <a:t>Iker es del Athletic. Cuando gana, lo celebra con sus amigos; cuando pierde, se pone triste. Siente un «nosotros» muy fuerte.</a:t>
+              <a:t>Un chico es del Athletic. Cuando gana, lo celebra con sus amigos; cuando pierde, se pone triste. Siente un «nosotros» muy fuerte.</a:t>
             </a:r>
           </a:p>
         </p:txBody>
@@ -5737,7 +5737,7 @@
                 </a:solidFill>
                 <a:latin typeface="Nunito Sans"/>
               </a:rPr>
-              <a:t>En el campamento de Sherif, ______ por premios unió a cada grupo por dentro, pero los enfrentó.  (sesión 65)</a:t>
+              <a:t>En el campamento de los dos equipos, ______ por premios unió a cada grupo por dentro, pero los enfrentó.  (sesión 65)</a:t>
             </a:r>
           </a:p>
           <a:p>
@@ -5957,7 +5957,7 @@
                 </a:solidFill>
                 <a:latin typeface="Nunito Sans"/>
               </a:rPr>
-              <a:t>En el campamento de Sherif, </a:t>
+              <a:t>En el campamento de los dos equipos, </a:t>
             </a:r>
             <a:r>
               <a:rPr sz="2600" b="1">
